--- a/bublik-cli/src/test/resources/images/pictures.pptx
+++ b/bublik-cli/src/test/resources/images/pictures.pptx
@@ -6,6 +6,7 @@
   </p:sldMasterIdLst>
   <p:sldIdLst>
     <p:sldId id="256" r:id="rId2"/>
+    <p:sldId id="257" r:id="rId3"/>
   </p:sldIdLst>
   <p:sldSz cx="12192000" cy="6858000"/>
   <p:notesSz cx="6858000" cy="9144000"/>
@@ -259,7 +260,7 @@
           <a:p>
             <a:fld id="{8C1E0B3C-E2C7-534D-971A-DFA71DA59DBD}" type="datetimeFigureOut">
               <a:rPr lang="en-US" smtClean="0"/>
-              <a:t>5/13/26</a:t>
+              <a:t>7/8/26</a:t>
             </a:fld>
             <a:endParaRPr lang="en-US"/>
           </a:p>
@@ -457,7 +458,7 @@
           <a:p>
             <a:fld id="{8C1E0B3C-E2C7-534D-971A-DFA71DA59DBD}" type="datetimeFigureOut">
               <a:rPr lang="en-US" smtClean="0"/>
-              <a:t>5/13/26</a:t>
+              <a:t>7/8/26</a:t>
             </a:fld>
             <a:endParaRPr lang="en-US"/>
           </a:p>
@@ -665,7 +666,7 @@
           <a:p>
             <a:fld id="{8C1E0B3C-E2C7-534D-971A-DFA71DA59DBD}" type="datetimeFigureOut">
               <a:rPr lang="en-US" smtClean="0"/>
-              <a:t>5/13/26</a:t>
+              <a:t>7/8/26</a:t>
             </a:fld>
             <a:endParaRPr lang="en-US"/>
           </a:p>
@@ -863,7 +864,7 @@
           <a:p>
             <a:fld id="{8C1E0B3C-E2C7-534D-971A-DFA71DA59DBD}" type="datetimeFigureOut">
               <a:rPr lang="en-US" smtClean="0"/>
-              <a:t>5/13/26</a:t>
+              <a:t>7/8/26</a:t>
             </a:fld>
             <a:endParaRPr lang="en-US"/>
           </a:p>
@@ -1138,7 +1139,7 @@
           <a:p>
             <a:fld id="{8C1E0B3C-E2C7-534D-971A-DFA71DA59DBD}" type="datetimeFigureOut">
               <a:rPr lang="en-US" smtClean="0"/>
-              <a:t>5/13/26</a:t>
+              <a:t>7/8/26</a:t>
             </a:fld>
             <a:endParaRPr lang="en-US"/>
           </a:p>
@@ -1403,7 +1404,7 @@
           <a:p>
             <a:fld id="{8C1E0B3C-E2C7-534D-971A-DFA71DA59DBD}" type="datetimeFigureOut">
               <a:rPr lang="en-US" smtClean="0"/>
-              <a:t>5/13/26</a:t>
+              <a:t>7/8/26</a:t>
             </a:fld>
             <a:endParaRPr lang="en-US"/>
           </a:p>
@@ -1815,7 +1816,7 @@
           <a:p>
             <a:fld id="{8C1E0B3C-E2C7-534D-971A-DFA71DA59DBD}" type="datetimeFigureOut">
               <a:rPr lang="en-US" smtClean="0"/>
-              <a:t>5/13/26</a:t>
+              <a:t>7/8/26</a:t>
             </a:fld>
             <a:endParaRPr lang="en-US"/>
           </a:p>
@@ -1956,7 +1957,7 @@
           <a:p>
             <a:fld id="{8C1E0B3C-E2C7-534D-971A-DFA71DA59DBD}" type="datetimeFigureOut">
               <a:rPr lang="en-US" smtClean="0"/>
-              <a:t>5/13/26</a:t>
+              <a:t>7/8/26</a:t>
             </a:fld>
             <a:endParaRPr lang="en-US"/>
           </a:p>
@@ -2069,7 +2070,7 @@
           <a:p>
             <a:fld id="{8C1E0B3C-E2C7-534D-971A-DFA71DA59DBD}" type="datetimeFigureOut">
               <a:rPr lang="en-US" smtClean="0"/>
-              <a:t>5/13/26</a:t>
+              <a:t>7/8/26</a:t>
             </a:fld>
             <a:endParaRPr lang="en-US"/>
           </a:p>
@@ -2380,7 +2381,7 @@
           <a:p>
             <a:fld id="{8C1E0B3C-E2C7-534D-971A-DFA71DA59DBD}" type="datetimeFigureOut">
               <a:rPr lang="en-US" smtClean="0"/>
-              <a:t>5/13/26</a:t>
+              <a:t>7/8/26</a:t>
             </a:fld>
             <a:endParaRPr lang="en-US"/>
           </a:p>
@@ -2668,7 +2669,7 @@
           <a:p>
             <a:fld id="{8C1E0B3C-E2C7-534D-971A-DFA71DA59DBD}" type="datetimeFigureOut">
               <a:rPr lang="en-US" smtClean="0"/>
-              <a:t>5/13/26</a:t>
+              <a:t>7/8/26</a:t>
             </a:fld>
             <a:endParaRPr lang="en-US"/>
           </a:p>
@@ -2909,7 +2910,7 @@
           <a:p>
             <a:fld id="{8C1E0B3C-E2C7-534D-971A-DFA71DA59DBD}" type="datetimeFigureOut">
               <a:rPr lang="en-US" smtClean="0"/>
-              <a:t>5/13/26</a:t>
+              <a:t>7/8/26</a:t>
             </a:fld>
             <a:endParaRPr lang="en-US"/>
           </a:p>
@@ -4391,6 +4392,66 @@
 </p:sld>
 </file>
 
+<file path=ppt/slides/slide2.xml><?xml version="1.0" encoding="utf-8"?>
+<p:sld xmlns:a="http://schemas.openxmlformats.org/drawingml/2006/main" xmlns:r="http://schemas.openxmlformats.org/officeDocument/2006/relationships" xmlns:p="http://schemas.openxmlformats.org/presentationml/2006/main">
+  <p:cSld>
+    <p:spTree>
+      <p:nvGrpSpPr>
+        <p:cNvPr id="1" name=""/>
+        <p:cNvGrpSpPr/>
+        <p:nvPr/>
+      </p:nvGrpSpPr>
+      <p:grpSpPr>
+        <a:xfrm>
+          <a:off x="0" y="0"/>
+          <a:ext cx="0" cy="0"/>
+          <a:chOff x="0" y="0"/>
+          <a:chExt cx="0" cy="0"/>
+        </a:xfrm>
+      </p:grpSpPr>
+      <p:pic>
+        <p:nvPicPr>
+          <p:cNvPr id="6" name="Picture 5">
+            <a:extLst>
+              <a:ext uri="{FF2B5EF4-FFF2-40B4-BE49-F238E27FC236}">
+                <a16:creationId xmlns:a16="http://schemas.microsoft.com/office/drawing/2014/main" id="{4EC4E4C8-7859-03D1-A84F-93EC2C4FB31F}"/>
+              </a:ext>
+            </a:extLst>
+          </p:cNvPr>
+          <p:cNvPicPr>
+            <a:picLocks noChangeAspect="1"/>
+          </p:cNvPicPr>
+          <p:nvPr/>
+        </p:nvPicPr>
+        <p:blipFill>
+          <a:blip r:embed="rId2"/>
+          <a:stretch>
+            <a:fillRect/>
+          </a:stretch>
+        </p:blipFill>
+        <p:spPr>
+          <a:xfrm>
+            <a:off x="704636" y="515421"/>
+            <a:ext cx="1524856" cy="1670080"/>
+          </a:xfrm>
+          <a:prstGeom prst="rect">
+            <a:avLst/>
+          </a:prstGeom>
+        </p:spPr>
+      </p:pic>
+    </p:spTree>
+    <p:extLst>
+      <p:ext uri="{BB962C8B-B14F-4D97-AF65-F5344CB8AC3E}">
+        <p14:creationId xmlns:p14="http://schemas.microsoft.com/office/powerpoint/2010/main" val="1698842097"/>
+      </p:ext>
+    </p:extLst>
+  </p:cSld>
+  <p:clrMapOvr>
+    <a:masterClrMapping/>
+  </p:clrMapOvr>
+</p:sld>
+</file>
+
 <file path=ppt/theme/theme1.xml><?xml version="1.0" encoding="utf-8"?>
 <a:theme xmlns:a="http://schemas.openxmlformats.org/drawingml/2006/main" name="Office Theme">
   <a:themeElements>

--- a/bublik-cli/src/test/resources/images/pictures.pptx
+++ b/bublik-cli/src/test/resources/images/pictures.pptx
@@ -260,7 +260,7 @@
           <a:p>
             <a:fld id="{8C1E0B3C-E2C7-534D-971A-DFA71DA59DBD}" type="datetimeFigureOut">
               <a:rPr lang="en-US" smtClean="0"/>
-              <a:t>7/8/26</a:t>
+              <a:t>7/14/26</a:t>
             </a:fld>
             <a:endParaRPr lang="en-US"/>
           </a:p>
@@ -458,7 +458,7 @@
           <a:p>
             <a:fld id="{8C1E0B3C-E2C7-534D-971A-DFA71DA59DBD}" type="datetimeFigureOut">
               <a:rPr lang="en-US" smtClean="0"/>
-              <a:t>7/8/26</a:t>
+              <a:t>7/14/26</a:t>
             </a:fld>
             <a:endParaRPr lang="en-US"/>
           </a:p>
@@ -666,7 +666,7 @@
           <a:p>
             <a:fld id="{8C1E0B3C-E2C7-534D-971A-DFA71DA59DBD}" type="datetimeFigureOut">
               <a:rPr lang="en-US" smtClean="0"/>
-              <a:t>7/8/26</a:t>
+              <a:t>7/14/26</a:t>
             </a:fld>
             <a:endParaRPr lang="en-US"/>
           </a:p>
@@ -864,7 +864,7 @@
           <a:p>
             <a:fld id="{8C1E0B3C-E2C7-534D-971A-DFA71DA59DBD}" type="datetimeFigureOut">
               <a:rPr lang="en-US" smtClean="0"/>
-              <a:t>7/8/26</a:t>
+              <a:t>7/14/26</a:t>
             </a:fld>
             <a:endParaRPr lang="en-US"/>
           </a:p>
@@ -1139,7 +1139,7 @@
           <a:p>
             <a:fld id="{8C1E0B3C-E2C7-534D-971A-DFA71DA59DBD}" type="datetimeFigureOut">
               <a:rPr lang="en-US" smtClean="0"/>
-              <a:t>7/8/26</a:t>
+              <a:t>7/14/26</a:t>
             </a:fld>
             <a:endParaRPr lang="en-US"/>
           </a:p>
@@ -1404,7 +1404,7 @@
           <a:p>
             <a:fld id="{8C1E0B3C-E2C7-534D-971A-DFA71DA59DBD}" type="datetimeFigureOut">
               <a:rPr lang="en-US" smtClean="0"/>
-              <a:t>7/8/26</a:t>
+              <a:t>7/14/26</a:t>
             </a:fld>
             <a:endParaRPr lang="en-US"/>
           </a:p>
@@ -1816,7 +1816,7 @@
           <a:p>
             <a:fld id="{8C1E0B3C-E2C7-534D-971A-DFA71DA59DBD}" type="datetimeFigureOut">
               <a:rPr lang="en-US" smtClean="0"/>
-              <a:t>7/8/26</a:t>
+              <a:t>7/14/26</a:t>
             </a:fld>
             <a:endParaRPr lang="en-US"/>
           </a:p>
@@ -1957,7 +1957,7 @@
           <a:p>
             <a:fld id="{8C1E0B3C-E2C7-534D-971A-DFA71DA59DBD}" type="datetimeFigureOut">
               <a:rPr lang="en-US" smtClean="0"/>
-              <a:t>7/8/26</a:t>
+              <a:t>7/14/26</a:t>
             </a:fld>
             <a:endParaRPr lang="en-US"/>
           </a:p>
@@ -2070,7 +2070,7 @@
           <a:p>
             <a:fld id="{8C1E0B3C-E2C7-534D-971A-DFA71DA59DBD}" type="datetimeFigureOut">
               <a:rPr lang="en-US" smtClean="0"/>
-              <a:t>7/8/26</a:t>
+              <a:t>7/14/26</a:t>
             </a:fld>
             <a:endParaRPr lang="en-US"/>
           </a:p>
@@ -2381,7 +2381,7 @@
           <a:p>
             <a:fld id="{8C1E0B3C-E2C7-534D-971A-DFA71DA59DBD}" type="datetimeFigureOut">
               <a:rPr lang="en-US" smtClean="0"/>
-              <a:t>7/8/26</a:t>
+              <a:t>7/14/26</a:t>
             </a:fld>
             <a:endParaRPr lang="en-US"/>
           </a:p>
@@ -2669,7 +2669,7 @@
           <a:p>
             <a:fld id="{8C1E0B3C-E2C7-534D-971A-DFA71DA59DBD}" type="datetimeFigureOut">
               <a:rPr lang="en-US" smtClean="0"/>
-              <a:t>7/8/26</a:t>
+              <a:t>7/14/26</a:t>
             </a:fld>
             <a:endParaRPr lang="en-US"/>
           </a:p>
@@ -2910,7 +2910,7 @@
           <a:p>
             <a:fld id="{8C1E0B3C-E2C7-534D-971A-DFA71DA59DBD}" type="datetimeFigureOut">
               <a:rPr lang="en-US" smtClean="0"/>
-              <a:t>7/8/26</a:t>
+              <a:t>7/14/26</a:t>
             </a:fld>
             <a:endParaRPr lang="en-US"/>
           </a:p>
@@ -4379,6 +4379,138 @@
           </a:prstGeom>
         </p:spPr>
       </p:pic>
+      <p:pic>
+        <p:nvPicPr>
+          <p:cNvPr id="28" name="Picture 2" descr="What is Kafka? | OVHcloud Worldwide">
+            <a:extLst>
+              <a:ext uri="{FF2B5EF4-FFF2-40B4-BE49-F238E27FC236}">
+                <a16:creationId xmlns:a16="http://schemas.microsoft.com/office/drawing/2014/main" id="{BABC511B-FDDB-4B25-7EA0-829673CCCC50}"/>
+              </a:ext>
+            </a:extLst>
+          </p:cNvPr>
+          <p:cNvPicPr>
+            <a:picLocks noChangeAspect="1" noChangeArrowheads="1"/>
+          </p:cNvPicPr>
+          <p:nvPr/>
+        </p:nvPicPr>
+        <p:blipFill>
+          <a:blip r:embed="rId7">
+            <a:extLst>
+              <a:ext uri="{28A0092B-C50C-407E-A947-70E740481C1C}">
+                <a14:useLocalDpi xmlns:a14="http://schemas.microsoft.com/office/drawing/2010/main" val="0"/>
+              </a:ext>
+            </a:extLst>
+          </a:blip>
+          <a:srcRect/>
+          <a:stretch>
+            <a:fillRect/>
+          </a:stretch>
+        </p:blipFill>
+        <p:spPr bwMode="auto">
+          <a:xfrm>
+            <a:off x="9858639" y="3796622"/>
+            <a:ext cx="1556346" cy="601912"/>
+          </a:xfrm>
+          <a:prstGeom prst="rect">
+            <a:avLst/>
+          </a:prstGeom>
+          <a:noFill/>
+          <a:extLst>
+            <a:ext uri="{909E8E84-426E-40DD-AFC4-6F175D3DCCD1}">
+              <a14:hiddenFill xmlns:a14="http://schemas.microsoft.com/office/drawing/2010/main">
+                <a:solidFill>
+                  <a:srgbClr val="FFFFFF"/>
+                </a:solidFill>
+              </a14:hiddenFill>
+            </a:ext>
+          </a:extLst>
+        </p:spPr>
+      </p:pic>
+      <p:pic>
+        <p:nvPicPr>
+          <p:cNvPr id="31" name="Picture 30">
+            <a:extLst>
+              <a:ext uri="{FF2B5EF4-FFF2-40B4-BE49-F238E27FC236}">
+                <a16:creationId xmlns:a16="http://schemas.microsoft.com/office/drawing/2014/main" id="{521990BE-3997-B6EE-59BE-D2BF118DEE06}"/>
+              </a:ext>
+            </a:extLst>
+          </p:cNvPr>
+          <p:cNvPicPr>
+            <a:picLocks noChangeAspect="1"/>
+          </p:cNvPicPr>
+          <p:nvPr/>
+        </p:nvPicPr>
+        <p:blipFill>
+          <a:blip r:embed="rId2"/>
+          <a:stretch>
+            <a:fillRect/>
+          </a:stretch>
+        </p:blipFill>
+        <p:spPr>
+          <a:xfrm>
+            <a:off x="7880967" y="3456757"/>
+            <a:ext cx="1270131" cy="1270131"/>
+          </a:xfrm>
+          <a:prstGeom prst="rect">
+            <a:avLst/>
+          </a:prstGeom>
+        </p:spPr>
+      </p:pic>
+      <p:sp>
+        <p:nvSpPr>
+          <p:cNvPr id="32" name="Right Arrow 31">
+            <a:extLst>
+              <a:ext uri="{FF2B5EF4-FFF2-40B4-BE49-F238E27FC236}">
+                <a16:creationId xmlns:a16="http://schemas.microsoft.com/office/drawing/2014/main" id="{60042600-1509-94A6-FA44-8A5DE7E6128C}"/>
+              </a:ext>
+            </a:extLst>
+          </p:cNvPr>
+          <p:cNvSpPr/>
+          <p:nvPr/>
+        </p:nvSpPr>
+        <p:spPr>
+          <a:xfrm>
+            <a:off x="9225568" y="3954338"/>
+            <a:ext cx="633071" cy="306634"/>
+          </a:xfrm>
+          <a:prstGeom prst="rightArrow">
+            <a:avLst>
+              <a:gd name="adj1" fmla="val 50000"/>
+              <a:gd name="adj2" fmla="val 104933"/>
+            </a:avLst>
+          </a:prstGeom>
+          <a:solidFill>
+            <a:srgbClr val="EF1B24"/>
+          </a:solidFill>
+          <a:ln>
+            <a:noFill/>
+          </a:ln>
+        </p:spPr>
+        <p:style>
+          <a:lnRef idx="2">
+            <a:schemeClr val="accent1">
+              <a:shade val="15000"/>
+            </a:schemeClr>
+          </a:lnRef>
+          <a:fillRef idx="1">
+            <a:schemeClr val="accent1"/>
+          </a:fillRef>
+          <a:effectRef idx="0">
+            <a:schemeClr val="accent1"/>
+          </a:effectRef>
+          <a:fontRef idx="minor">
+            <a:schemeClr val="lt1"/>
+          </a:fontRef>
+        </p:style>
+        <p:txBody>
+          <a:bodyPr rtlCol="0" anchor="ctr"/>
+          <a:lstStyle/>
+          <a:p>
+            <a:pPr algn="ctr"/>
+            <a:endParaRPr lang="en-US"/>
+          </a:p>
+        </p:txBody>
+      </p:sp>
     </p:spTree>
     <p:extLst>
       <p:ext uri="{BB962C8B-B14F-4D97-AF65-F5344CB8AC3E}">
